--- a/hearts-and-minds/journey-decks/hm-journey-ruth-v1.pptx
+++ b/hearts-and-minds/journey-decks/hm-journey-ruth-v1.pptx
@@ -1923,7 +1923,7 @@
       </p:sp>
       <p:pic>
         <p:nvPicPr>
-          <p:cNvPr id="10" name="Image 1" descr="/sessions/quirky-zen-galileo/mnt/outputs/hmdecks/img/ruth-portrait.jpg">    </p:cNvPr>
+          <p:cNvPr id="10" name="Image 1" descr="/sessions/quirky-zen-galileo/mnt/outputs/hmdecks5/img/ruth-portrait.jpg">    </p:cNvPr>
           <p:cNvPicPr>
             <a:picLocks noChangeAspect="1"/>
           </p:cNvPicPr>
